--- a/lessons/8-5/slides.pptx
+++ b/lessons/8-5/slides.pptx
@@ -10684,7 +10684,7 @@
       </p:sp>
       <p:sp>
         <p:nvSpPr>
-          <p:cNvPr id="20" name="Shape 18"/>
+          <p:cNvPr id="20" name="Text 18"/>
           <p:cNvSpPr/>
           <p:nvPr/>
         </p:nvSpPr>
@@ -10705,33 +10705,7 @@
             <a:solidFill>
               <a:srgbClr val="D6DBDF"/>
             </a:solidFill>
-            <a:prstDash val="solid"/>
           </a:ln>
-          <a:effectLst>
-            <a:outerShdw sx="100000" sy="100000" kx="0" ky="0" algn="bl" rotWithShape="0" blurRad="50800" dist="12700" dir="5400000">
-              <a:srgbClr val="1C2E42">
-                <a:alpha val="10000"/>
-              </a:srgbClr>
-            </a:outerShdw>
-          </a:effectLst>
-        </p:spPr>
-      </p:sp>
-      <p:sp>
-        <p:nvSpPr>
-          <p:cNvPr id="21" name="Text 19"/>
-          <p:cNvSpPr/>
-          <p:nvPr/>
-        </p:nvSpPr>
-        <p:spPr>
-          <a:xfrm>
-            <a:off x="685800" y="1481328"/>
-            <a:ext cx="1447800" cy="384048"/>
-          </a:xfrm>
-          <a:prstGeom prst="rect">
-            <a:avLst/>
-          </a:prstGeom>
-          <a:noFill/>
-          <a:ln/>
         </p:spPr>
         <p:txBody>
           <a:bodyPr wrap="square" rtlCol="0" anchor="ctr"/>
@@ -10741,7 +10715,7 @@
               <a:buNone/>
             </a:pPr>
             <a:r>
-              <a:rPr lang="en-US" sz="900" dirty="0">
+              <a:rPr lang="en-US" sz="900" b="1" dirty="0">
                 <a:solidFill>
                   <a:srgbClr val="17324D"/>
                 </a:solidFill>
@@ -10757,7 +10731,7 @@
       </p:sp>
       <p:sp>
         <p:nvSpPr>
-          <p:cNvPr id="22" name="Shape 20"/>
+          <p:cNvPr id="21" name="Text 19"/>
           <p:cNvSpPr/>
           <p:nvPr/>
         </p:nvSpPr>
@@ -10778,33 +10752,7 @@
             <a:solidFill>
               <a:srgbClr val="D6DBDF"/>
             </a:solidFill>
-            <a:prstDash val="solid"/>
           </a:ln>
-          <a:effectLst>
-            <a:outerShdw sx="100000" sy="100000" kx="0" ky="0" algn="bl" rotWithShape="0" blurRad="50800" dist="12700" dir="5400000">
-              <a:srgbClr val="1C2E42">
-                <a:alpha val="10000"/>
-              </a:srgbClr>
-            </a:outerShdw>
-          </a:effectLst>
-        </p:spPr>
-      </p:sp>
-      <p:sp>
-        <p:nvSpPr>
-          <p:cNvPr id="23" name="Text 21"/>
-          <p:cNvSpPr/>
-          <p:nvPr/>
-        </p:nvSpPr>
-        <p:spPr>
-          <a:xfrm>
-            <a:off x="2453640" y="1481328"/>
-            <a:ext cx="1447800" cy="384048"/>
-          </a:xfrm>
-          <a:prstGeom prst="rect">
-            <a:avLst/>
-          </a:prstGeom>
-          <a:noFill/>
-          <a:ln/>
         </p:spPr>
         <p:txBody>
           <a:bodyPr wrap="square" rtlCol="0" anchor="ctr"/>
@@ -10814,7 +10762,7 @@
               <a:buNone/>
             </a:pPr>
             <a:r>
-              <a:rPr lang="en-US" sz="900" dirty="0">
+              <a:rPr lang="en-US" sz="900" b="1" dirty="0">
                 <a:solidFill>
                   <a:srgbClr val="17324D"/>
                 </a:solidFill>
@@ -10830,7 +10778,7 @@
       </p:sp>
       <p:sp>
         <p:nvSpPr>
-          <p:cNvPr id="24" name="Shape 22"/>
+          <p:cNvPr id="22" name="Text 20"/>
           <p:cNvSpPr/>
           <p:nvPr/>
         </p:nvSpPr>
@@ -10851,33 +10799,7 @@
             <a:solidFill>
               <a:srgbClr val="D6DBDF"/>
             </a:solidFill>
-            <a:prstDash val="solid"/>
           </a:ln>
-          <a:effectLst>
-            <a:outerShdw sx="100000" sy="100000" kx="0" ky="0" algn="bl" rotWithShape="0" blurRad="50800" dist="12700" dir="5400000">
-              <a:srgbClr val="1C2E42">
-                <a:alpha val="10000"/>
-              </a:srgbClr>
-            </a:outerShdw>
-          </a:effectLst>
-        </p:spPr>
-      </p:sp>
-      <p:sp>
-        <p:nvSpPr>
-          <p:cNvPr id="25" name="Text 23"/>
-          <p:cNvSpPr/>
-          <p:nvPr/>
-        </p:nvSpPr>
-        <p:spPr>
-          <a:xfrm>
-            <a:off x="4221480" y="1481328"/>
-            <a:ext cx="1447800" cy="384048"/>
-          </a:xfrm>
-          <a:prstGeom prst="rect">
-            <a:avLst/>
-          </a:prstGeom>
-          <a:noFill/>
-          <a:ln/>
         </p:spPr>
         <p:txBody>
           <a:bodyPr wrap="square" rtlCol="0" anchor="ctr"/>
@@ -10887,7 +10809,7 @@
               <a:buNone/>
             </a:pPr>
             <a:r>
-              <a:rPr lang="en-US" sz="900" dirty="0">
+              <a:rPr lang="en-US" sz="900" b="1" dirty="0">
                 <a:solidFill>
                   <a:srgbClr val="17324D"/>
                 </a:solidFill>
@@ -10903,7 +10825,7 @@
       </p:sp>
       <p:sp>
         <p:nvSpPr>
-          <p:cNvPr id="26" name="Shape 24"/>
+          <p:cNvPr id="23" name="Text 21"/>
           <p:cNvSpPr/>
           <p:nvPr/>
         </p:nvSpPr>
@@ -10924,33 +10846,7 @@
             <a:solidFill>
               <a:srgbClr val="D6DBDF"/>
             </a:solidFill>
-            <a:prstDash val="solid"/>
           </a:ln>
-          <a:effectLst>
-            <a:outerShdw sx="100000" sy="100000" kx="0" ky="0" algn="bl" rotWithShape="0" blurRad="50800" dist="12700" dir="5400000">
-              <a:srgbClr val="1C2E42">
-                <a:alpha val="10000"/>
-              </a:srgbClr>
-            </a:outerShdw>
-          </a:effectLst>
-        </p:spPr>
-      </p:sp>
-      <p:sp>
-        <p:nvSpPr>
-          <p:cNvPr id="27" name="Text 25"/>
-          <p:cNvSpPr/>
-          <p:nvPr/>
-        </p:nvSpPr>
-        <p:spPr>
-          <a:xfrm>
-            <a:off x="685800" y="1975104"/>
-            <a:ext cx="1447800" cy="384048"/>
-          </a:xfrm>
-          <a:prstGeom prst="rect">
-            <a:avLst/>
-          </a:prstGeom>
-          <a:noFill/>
-          <a:ln/>
         </p:spPr>
         <p:txBody>
           <a:bodyPr wrap="square" rtlCol="0" anchor="ctr"/>
@@ -10960,7 +10856,7 @@
               <a:buNone/>
             </a:pPr>
             <a:r>
-              <a:rPr lang="en-US" sz="900" dirty="0">
+              <a:rPr lang="en-US" sz="900" b="1" dirty="0">
                 <a:solidFill>
                   <a:srgbClr val="17324D"/>
                 </a:solidFill>
@@ -10976,7 +10872,7 @@
       </p:sp>
       <p:sp>
         <p:nvSpPr>
-          <p:cNvPr id="28" name="Shape 26"/>
+          <p:cNvPr id="24" name="Shape 22"/>
           <p:cNvSpPr/>
           <p:nvPr/>
         </p:nvSpPr>
@@ -11010,7 +10906,7 @@
       </p:sp>
       <p:sp>
         <p:nvSpPr>
-          <p:cNvPr id="29" name="Text 27"/>
+          <p:cNvPr id="25" name="Text 23"/>
           <p:cNvSpPr/>
           <p:nvPr/>
         </p:nvSpPr>
@@ -11051,7 +10947,7 @@
       </p:sp>
       <p:sp>
         <p:nvSpPr>
-          <p:cNvPr id="30" name="Shape 28"/>
+          <p:cNvPr id="26" name="Shape 24"/>
           <p:cNvSpPr/>
           <p:nvPr/>
         </p:nvSpPr>
@@ -11085,7 +10981,7 @@
       </p:sp>
       <p:sp>
         <p:nvSpPr>
-          <p:cNvPr id="31" name="Text 29"/>
+          <p:cNvPr id="27" name="Text 25"/>
           <p:cNvSpPr/>
           <p:nvPr/>
         </p:nvSpPr>
@@ -11126,7 +11022,7 @@
       </p:sp>
       <p:sp>
         <p:nvSpPr>
-          <p:cNvPr id="32" name="Shape 30"/>
+          <p:cNvPr id="28" name="Shape 26"/>
           <p:cNvSpPr/>
           <p:nvPr/>
         </p:nvSpPr>
@@ -11160,7 +11056,7 @@
       </p:sp>
       <p:sp>
         <p:nvSpPr>
-          <p:cNvPr id="33" name="Text 31"/>
+          <p:cNvPr id="29" name="Text 27"/>
           <p:cNvSpPr/>
           <p:nvPr/>
         </p:nvSpPr>
@@ -11201,7 +11097,7 @@
       </p:sp>
       <p:sp>
         <p:nvSpPr>
-          <p:cNvPr id="34" name="Text 32"/>
+          <p:cNvPr id="30" name="Text 28"/>
           <p:cNvSpPr/>
           <p:nvPr/>
         </p:nvSpPr>
@@ -11240,7 +11136,7 @@
       </p:sp>
       <p:sp>
         <p:nvSpPr>
-          <p:cNvPr id="35" name="Shape 33"/>
+          <p:cNvPr id="31" name="Shape 29"/>
           <p:cNvSpPr/>
           <p:nvPr/>
         </p:nvSpPr>
@@ -11263,7 +11159,7 @@
       </p:sp>
       <p:sp>
         <p:nvSpPr>
-          <p:cNvPr id="36" name="Shape 34"/>
+          <p:cNvPr id="32" name="Shape 30"/>
           <p:cNvSpPr/>
           <p:nvPr/>
         </p:nvSpPr>
@@ -11286,7 +11182,7 @@
       </p:sp>
       <p:sp>
         <p:nvSpPr>
-          <p:cNvPr id="37" name="Shape 35"/>
+          <p:cNvPr id="33" name="Shape 31"/>
           <p:cNvSpPr/>
           <p:nvPr/>
         </p:nvSpPr>
@@ -11309,7 +11205,7 @@
       </p:sp>
       <p:sp>
         <p:nvSpPr>
-          <p:cNvPr id="38" name="Shape 36"/>
+          <p:cNvPr id="34" name="Shape 32"/>
           <p:cNvSpPr/>
           <p:nvPr/>
         </p:nvSpPr>
@@ -11332,7 +11228,7 @@
       </p:sp>
       <p:sp>
         <p:nvSpPr>
-          <p:cNvPr id="39" name="Shape 37"/>
+          <p:cNvPr id="35" name="Shape 33"/>
           <p:cNvSpPr/>
           <p:nvPr/>
         </p:nvSpPr>

--- a/lessons/8-5/slides.pptx
+++ b/lessons/8-5/slides.pptx
@@ -2584,7 +2584,7 @@
                 <a:ea typeface="Outfit" pitchFamily="34" charset="-122"/>
                 <a:cs typeface="Outfit" pitchFamily="34" charset="-120"/>
               </a:rPr>
-              <a:t>6.SP.4</a:t>
+              <a:t>6.DS.5</a:t>
             </a:r>
             <a:endParaRPr lang="en-US" sz="1000" dirty="0"/>
           </a:p>
@@ -3307,7 +3307,7 @@
                 <a:ea typeface="Outfit" pitchFamily="34" charset="-122"/>
                 <a:cs typeface="Outfit" pitchFamily="34" charset="-120"/>
               </a:rPr>
-              <a:t>6.SP.4</a:t>
+              <a:t>6.DS.5</a:t>
             </a:r>
             <a:endParaRPr lang="en-US" sz="900" dirty="0"/>
           </a:p>
@@ -4436,7 +4436,7 @@
                 <a:ea typeface="Outfit" pitchFamily="34" charset="-122"/>
                 <a:cs typeface="Outfit" pitchFamily="34" charset="-120"/>
               </a:rPr>
-              <a:t>6.SP.4</a:t>
+              <a:t>6.DS.5</a:t>
             </a:r>
             <a:endParaRPr lang="en-US" sz="900" dirty="0"/>
           </a:p>
@@ -5546,7 +5546,7 @@
                 <a:ea typeface="Outfit" pitchFamily="34" charset="-122"/>
                 <a:cs typeface="Outfit" pitchFamily="34" charset="-120"/>
               </a:rPr>
-              <a:t>6.SP.4</a:t>
+              <a:t>6.DS.5</a:t>
             </a:r>
             <a:endParaRPr lang="en-US" sz="900" dirty="0"/>
           </a:p>
@@ -6882,7 +6882,7 @@
                 <a:ea typeface="Outfit" pitchFamily="34" charset="-122"/>
                 <a:cs typeface="Outfit" pitchFamily="34" charset="-120"/>
               </a:rPr>
-              <a:t>6.SP.4</a:t>
+              <a:t>6.DS.5</a:t>
             </a:r>
             <a:endParaRPr lang="en-US" sz="900" dirty="0"/>
           </a:p>
@@ -8176,7 +8176,7 @@
                 <a:ea typeface="Outfit" pitchFamily="34" charset="-122"/>
                 <a:cs typeface="Outfit" pitchFamily="34" charset="-120"/>
               </a:rPr>
-              <a:t>6.SP.4</a:t>
+              <a:t>6.DS.5</a:t>
             </a:r>
             <a:endParaRPr lang="en-US" sz="900" dirty="0"/>
           </a:p>
@@ -9238,7 +9238,7 @@
                 <a:ea typeface="Outfit" pitchFamily="34" charset="-122"/>
                 <a:cs typeface="Outfit" pitchFamily="34" charset="-120"/>
               </a:rPr>
-              <a:t>6.SP.4</a:t>
+              <a:t>6.DS.5</a:t>
             </a:r>
             <a:endParaRPr lang="en-US" sz="900" dirty="0"/>
           </a:p>
@@ -10203,7 +10203,7 @@
                 <a:ea typeface="Outfit" pitchFamily="34" charset="-122"/>
                 <a:cs typeface="Outfit" pitchFamily="34" charset="-120"/>
               </a:rPr>
-              <a:t>6.SP.4</a:t>
+              <a:t>6.DS.5</a:t>
             </a:r>
             <a:endParaRPr lang="en-US" sz="900" dirty="0"/>
           </a:p>
@@ -11120,7 +11120,7 @@
                 <a:ea typeface="Outfit" pitchFamily="34" charset="-122"/>
                 <a:cs typeface="Outfit" pitchFamily="34" charset="-120"/>
               </a:rPr>
-              <a:t>6.SP.4</a:t>
+              <a:t>6.DS.5</a:t>
             </a:r>
             <a:endParaRPr lang="en-US" sz="900" dirty="0"/>
           </a:p>
@@ -12248,7 +12248,7 @@
                 <a:ea typeface="Outfit" pitchFamily="34" charset="-122"/>
                 <a:cs typeface="Outfit" pitchFamily="34" charset="-120"/>
               </a:rPr>
-              <a:t>6.SP.4</a:t>
+              <a:t>6.DS.5</a:t>
             </a:r>
             <a:endParaRPr lang="en-US" sz="900" dirty="0"/>
           </a:p>
@@ -13681,7 +13681,7 @@
                 <a:ea typeface="Outfit" pitchFamily="34" charset="-122"/>
                 <a:cs typeface="Outfit" pitchFamily="34" charset="-120"/>
               </a:rPr>
-              <a:t>6.SP.4</a:t>
+              <a:t>6.DS.5</a:t>
             </a:r>
             <a:endParaRPr lang="en-US" sz="900" dirty="0"/>
           </a:p>
@@ -14495,7 +14495,7 @@
                 <a:ea typeface="Outfit" pitchFamily="34" charset="-122"/>
                 <a:cs typeface="Outfit" pitchFamily="34" charset="-120"/>
               </a:rPr>
-              <a:t>6.SP.4</a:t>
+              <a:t>6.DS.5</a:t>
             </a:r>
             <a:endParaRPr lang="en-US" sz="900" dirty="0"/>
           </a:p>
@@ -15602,7 +15602,7 @@
                 <a:ea typeface="Outfit" pitchFamily="34" charset="-122"/>
                 <a:cs typeface="Outfit" pitchFamily="34" charset="-120"/>
               </a:rPr>
-              <a:t>6.SP.4</a:t>
+              <a:t>6.DS.5</a:t>
             </a:r>
             <a:endParaRPr lang="en-US" sz="900" dirty="0"/>
           </a:p>
@@ -16709,7 +16709,7 @@
                 <a:ea typeface="Outfit" pitchFamily="34" charset="-122"/>
                 <a:cs typeface="Outfit" pitchFamily="34" charset="-120"/>
               </a:rPr>
-              <a:t>6.SP.4</a:t>
+              <a:t>6.DS.5</a:t>
             </a:r>
             <a:endParaRPr lang="en-US" sz="900" dirty="0"/>
           </a:p>
@@ -17816,7 +17816,7 @@
                 <a:ea typeface="Outfit" pitchFamily="34" charset="-122"/>
                 <a:cs typeface="Outfit" pitchFamily="34" charset="-120"/>
               </a:rPr>
-              <a:t>6.SP.4</a:t>
+              <a:t>6.DS.5</a:t>
             </a:r>
             <a:endParaRPr lang="en-US" sz="900" dirty="0"/>
           </a:p>
@@ -18923,7 +18923,7 @@
                 <a:ea typeface="Outfit" pitchFamily="34" charset="-122"/>
                 <a:cs typeface="Outfit" pitchFamily="34" charset="-120"/>
               </a:rPr>
-              <a:t>6.SP.4</a:t>
+              <a:t>6.DS.5</a:t>
             </a:r>
             <a:endParaRPr lang="en-US" sz="900" dirty="0"/>
           </a:p>
@@ -19983,7 +19983,7 @@
                 <a:ea typeface="Outfit" pitchFamily="34" charset="-122"/>
                 <a:cs typeface="Outfit" pitchFamily="34" charset="-120"/>
               </a:rPr>
-              <a:t>6.SP.4</a:t>
+              <a:t>6.DS.5</a:t>
             </a:r>
             <a:endParaRPr lang="en-US" sz="900" dirty="0"/>
           </a:p>
@@ -20971,7 +20971,7 @@
                 <a:ea typeface="Outfit" pitchFamily="34" charset="-122"/>
                 <a:cs typeface="Outfit" pitchFamily="34" charset="-120"/>
               </a:rPr>
-              <a:t>6.SP.4</a:t>
+              <a:t>6.DS.5</a:t>
             </a:r>
             <a:endParaRPr lang="en-US" sz="900" dirty="0"/>
           </a:p>
